--- a/Section 504/Topic2-Assessment-504.pptx
+++ b/Section 504/Topic2-Assessment-504.pptx
@@ -1740,6 +1740,40 @@
           </a:p>
         </p:txBody>
       </p:sp>
+      <p:sp>
+        <p:nvSpPr>
+          <p:cNvPr id="9" name="Slide Number 9"/>
+          <p:cNvSpPr txBox="1"/>
+          <p:nvPr/>
+        </p:nvSpPr>
+        <p:spPr>
+          <a:xfrm>
+            <a:off x="11277295" y="6611112"/>
+            <a:ext cx="685800" cy="201168"/>
+          </a:xfrm>
+          <a:prstGeom prst="rect">
+            <a:avLst/>
+          </a:prstGeom>
+          <a:noFill/>
+        </p:spPr>
+        <p:txBody>
+          <a:bodyPr wrap="none" lIns="0" tIns="0" rIns="0" bIns="0" anchor="b">
+            <a:noAutofit/>
+          </a:bodyPr>
+          <a:lstStyle/>
+          <a:p>
+            <a:pPr algn="r"/>
+            <a:fld id="{5C1A6E0B-3B1F-4D5E-9C7A-2F4B8D6E1A90}" type="slidenum">
+              <a:rPr lang="en-US" sz="1200" dirty="0">
+                <a:solidFill>
+                  <a:srgbClr val="5F6272"/>
+                </a:solidFill>
+              </a:rPr>
+              <a:t>1</a:t>
+            </a:fld>
+          </a:p>
+        </p:txBody>
+      </p:sp>
     </p:spTree>
   </p:cSld>
   <p:clrMapOvr>
@@ -2376,6 +2410,40 @@
           </a:p>
         </p:txBody>
       </p:sp>
+      <p:sp>
+        <p:nvSpPr>
+          <p:cNvPr id="9" name="Slide Number 9"/>
+          <p:cNvSpPr txBox="1"/>
+          <p:nvPr/>
+        </p:nvSpPr>
+        <p:spPr>
+          <a:xfrm>
+            <a:off x="11277295" y="6611112"/>
+            <a:ext cx="685800" cy="201168"/>
+          </a:xfrm>
+          <a:prstGeom prst="rect">
+            <a:avLst/>
+          </a:prstGeom>
+          <a:noFill/>
+        </p:spPr>
+        <p:txBody>
+          <a:bodyPr wrap="none" lIns="0" tIns="0" rIns="0" bIns="0" anchor="b">
+            <a:noAutofit/>
+          </a:bodyPr>
+          <a:lstStyle/>
+          <a:p>
+            <a:pPr algn="r"/>
+            <a:fld id="{5C1A6E0B-3B1F-4D5E-9C7A-2F4B8D6E1A90}" type="slidenum">
+              <a:rPr lang="en-US" sz="1200" dirty="0">
+                <a:solidFill>
+                  <a:srgbClr val="5F6272"/>
+                </a:solidFill>
+              </a:rPr>
+              <a:t>10</a:t>
+            </a:fld>
+          </a:p>
+        </p:txBody>
+      </p:sp>
     </p:spTree>
   </p:cSld>
   <p:clrMapOvr>
@@ -2665,6 +2733,40 @@
           </a:p>
         </p:txBody>
       </p:sp>
+      <p:sp>
+        <p:nvSpPr>
+          <p:cNvPr id="6" name="Slide Number 6"/>
+          <p:cNvSpPr txBox="1"/>
+          <p:nvPr/>
+        </p:nvSpPr>
+        <p:spPr>
+          <a:xfrm>
+            <a:off x="11277295" y="6611112"/>
+            <a:ext cx="685800" cy="201168"/>
+          </a:xfrm>
+          <a:prstGeom prst="rect">
+            <a:avLst/>
+          </a:prstGeom>
+          <a:noFill/>
+        </p:spPr>
+        <p:txBody>
+          <a:bodyPr wrap="none" lIns="0" tIns="0" rIns="0" bIns="0" anchor="b">
+            <a:noAutofit/>
+          </a:bodyPr>
+          <a:lstStyle/>
+          <a:p>
+            <a:pPr algn="r"/>
+            <a:fld id="{5C1A6E0B-3B1F-4D5E-9C7A-2F4B8D6E1A90}" type="slidenum">
+              <a:rPr lang="en-US" sz="1200" dirty="0">
+                <a:solidFill>
+                  <a:srgbClr val="5F6272"/>
+                </a:solidFill>
+              </a:rPr>
+              <a:t>11</a:t>
+            </a:fld>
+          </a:p>
+        </p:txBody>
+      </p:sp>
     </p:spTree>
   </p:cSld>
   <p:clrMapOvr>
@@ -3205,6 +3307,40 @@
           </a:p>
         </p:txBody>
       </p:sp>
+      <p:sp>
+        <p:nvSpPr>
+          <p:cNvPr id="10" name="Slide Number 10"/>
+          <p:cNvSpPr txBox="1"/>
+          <p:nvPr/>
+        </p:nvSpPr>
+        <p:spPr>
+          <a:xfrm>
+            <a:off x="11277295" y="6611112"/>
+            <a:ext cx="685800" cy="201168"/>
+          </a:xfrm>
+          <a:prstGeom prst="rect">
+            <a:avLst/>
+          </a:prstGeom>
+          <a:noFill/>
+        </p:spPr>
+        <p:txBody>
+          <a:bodyPr wrap="none" lIns="0" tIns="0" rIns="0" bIns="0" anchor="b">
+            <a:noAutofit/>
+          </a:bodyPr>
+          <a:lstStyle/>
+          <a:p>
+            <a:pPr algn="r"/>
+            <a:fld id="{5C1A6E0B-3B1F-4D5E-9C7A-2F4B8D6E1A90}" type="slidenum">
+              <a:rPr lang="en-US" sz="1200" dirty="0">
+                <a:solidFill>
+                  <a:srgbClr val="5F6272"/>
+                </a:solidFill>
+              </a:rPr>
+              <a:t>12</a:t>
+            </a:fld>
+          </a:p>
+        </p:txBody>
+      </p:sp>
     </p:spTree>
   </p:cSld>
   <p:clrMapOvr>
@@ -4134,6 +4270,40 @@
           </a:p>
         </p:txBody>
       </p:sp>
+      <p:sp>
+        <p:nvSpPr>
+          <p:cNvPr id="19" name="Slide Number 19"/>
+          <p:cNvSpPr txBox="1"/>
+          <p:nvPr/>
+        </p:nvSpPr>
+        <p:spPr>
+          <a:xfrm>
+            <a:off x="11277295" y="6611112"/>
+            <a:ext cx="685800" cy="201168"/>
+          </a:xfrm>
+          <a:prstGeom prst="rect">
+            <a:avLst/>
+          </a:prstGeom>
+          <a:noFill/>
+        </p:spPr>
+        <p:txBody>
+          <a:bodyPr wrap="none" lIns="0" tIns="0" rIns="0" bIns="0" anchor="b">
+            <a:noAutofit/>
+          </a:bodyPr>
+          <a:lstStyle/>
+          <a:p>
+            <a:pPr algn="r"/>
+            <a:fld id="{5C1A6E0B-3B1F-4D5E-9C7A-2F4B8D6E1A90}" type="slidenum">
+              <a:rPr lang="en-US" sz="1200" dirty="0">
+                <a:solidFill>
+                  <a:srgbClr val="5F6272"/>
+                </a:solidFill>
+              </a:rPr>
+              <a:t>13</a:t>
+            </a:fld>
+          </a:p>
+        </p:txBody>
+      </p:sp>
     </p:spTree>
   </p:cSld>
   <p:clrMapOvr>
@@ -5063,6 +5233,40 @@
           </a:p>
         </p:txBody>
       </p:sp>
+      <p:sp>
+        <p:nvSpPr>
+          <p:cNvPr id="19" name="Slide Number 19"/>
+          <p:cNvSpPr txBox="1"/>
+          <p:nvPr/>
+        </p:nvSpPr>
+        <p:spPr>
+          <a:xfrm>
+            <a:off x="11277295" y="6611112"/>
+            <a:ext cx="685800" cy="201168"/>
+          </a:xfrm>
+          <a:prstGeom prst="rect">
+            <a:avLst/>
+          </a:prstGeom>
+          <a:noFill/>
+        </p:spPr>
+        <p:txBody>
+          <a:bodyPr wrap="none" lIns="0" tIns="0" rIns="0" bIns="0" anchor="b">
+            <a:noAutofit/>
+          </a:bodyPr>
+          <a:lstStyle/>
+          <a:p>
+            <a:pPr algn="r"/>
+            <a:fld id="{5C1A6E0B-3B1F-4D5E-9C7A-2F4B8D6E1A90}" type="slidenum">
+              <a:rPr lang="en-US" sz="1200" dirty="0">
+                <a:solidFill>
+                  <a:srgbClr val="5F6272"/>
+                </a:solidFill>
+              </a:rPr>
+              <a:t>14</a:t>
+            </a:fld>
+          </a:p>
+        </p:txBody>
+      </p:sp>
     </p:spTree>
   </p:cSld>
   <p:clrMapOvr>
@@ -6973,6 +7177,40 @@
           </a:p>
         </p:txBody>
       </p:sp>
+      <p:sp>
+        <p:nvSpPr>
+          <p:cNvPr id="50" name="Slide Number 50"/>
+          <p:cNvSpPr txBox="1"/>
+          <p:nvPr/>
+        </p:nvSpPr>
+        <p:spPr>
+          <a:xfrm>
+            <a:off x="11277295" y="6611112"/>
+            <a:ext cx="685800" cy="201168"/>
+          </a:xfrm>
+          <a:prstGeom prst="rect">
+            <a:avLst/>
+          </a:prstGeom>
+          <a:noFill/>
+        </p:spPr>
+        <p:txBody>
+          <a:bodyPr wrap="none" lIns="0" tIns="0" rIns="0" bIns="0" anchor="b">
+            <a:noAutofit/>
+          </a:bodyPr>
+          <a:lstStyle/>
+          <a:p>
+            <a:pPr algn="r"/>
+            <a:fld id="{5C1A6E0B-3B1F-4D5E-9C7A-2F4B8D6E1A90}" type="slidenum">
+              <a:rPr lang="en-US" sz="1200" dirty="0">
+                <a:solidFill>
+                  <a:srgbClr val="5F6272"/>
+                </a:solidFill>
+              </a:rPr>
+              <a:t>15</a:t>
+            </a:fld>
+          </a:p>
+        </p:txBody>
+      </p:sp>
     </p:spTree>
   </p:cSld>
   <p:clrMapOvr>
@@ -7673,6 +7911,40 @@
           </a:p>
         </p:txBody>
       </p:sp>
+      <p:sp>
+        <p:nvSpPr>
+          <p:cNvPr id="10" name="Slide Number 10"/>
+          <p:cNvSpPr txBox="1"/>
+          <p:nvPr/>
+        </p:nvSpPr>
+        <p:spPr>
+          <a:xfrm>
+            <a:off x="11277295" y="6611112"/>
+            <a:ext cx="685800" cy="201168"/>
+          </a:xfrm>
+          <a:prstGeom prst="rect">
+            <a:avLst/>
+          </a:prstGeom>
+          <a:noFill/>
+        </p:spPr>
+        <p:txBody>
+          <a:bodyPr wrap="none" lIns="0" tIns="0" rIns="0" bIns="0" anchor="b">
+            <a:noAutofit/>
+          </a:bodyPr>
+          <a:lstStyle/>
+          <a:p>
+            <a:pPr algn="r"/>
+            <a:fld id="{5C1A6E0B-3B1F-4D5E-9C7A-2F4B8D6E1A90}" type="slidenum">
+              <a:rPr lang="en-US" sz="1200" dirty="0">
+                <a:solidFill>
+                  <a:srgbClr val="5F6272"/>
+                </a:solidFill>
+              </a:rPr>
+              <a:t>16</a:t>
+            </a:fld>
+          </a:p>
+        </p:txBody>
+      </p:sp>
     </p:spTree>
   </p:cSld>
   <p:clrMapOvr>
@@ -8025,6 +8297,40 @@
           </a:p>
         </p:txBody>
       </p:sp>
+      <p:sp>
+        <p:nvSpPr>
+          <p:cNvPr id="8" name="Slide Number 8"/>
+          <p:cNvSpPr txBox="1"/>
+          <p:nvPr/>
+        </p:nvSpPr>
+        <p:spPr>
+          <a:xfrm>
+            <a:off x="11277295" y="6611112"/>
+            <a:ext cx="685800" cy="201168"/>
+          </a:xfrm>
+          <a:prstGeom prst="rect">
+            <a:avLst/>
+          </a:prstGeom>
+          <a:noFill/>
+        </p:spPr>
+        <p:txBody>
+          <a:bodyPr wrap="none" lIns="0" tIns="0" rIns="0" bIns="0" anchor="b">
+            <a:noAutofit/>
+          </a:bodyPr>
+          <a:lstStyle/>
+          <a:p>
+            <a:pPr algn="r"/>
+            <a:fld id="{5C1A6E0B-3B1F-4D5E-9C7A-2F4B8D6E1A90}" type="slidenum">
+              <a:rPr lang="en-US" sz="1200" dirty="0">
+                <a:solidFill>
+                  <a:srgbClr val="5F6272"/>
+                </a:solidFill>
+              </a:rPr>
+              <a:t>17</a:t>
+            </a:fld>
+          </a:p>
+        </p:txBody>
+      </p:sp>
     </p:spTree>
   </p:cSld>
   <p:clrMapOvr>
@@ -9968,6 +10274,40 @@
           </a:p>
         </p:txBody>
       </p:sp>
+      <p:sp>
+        <p:nvSpPr>
+          <p:cNvPr id="22" name="Slide Number 22"/>
+          <p:cNvSpPr txBox="1"/>
+          <p:nvPr/>
+        </p:nvSpPr>
+        <p:spPr>
+          <a:xfrm>
+            <a:off x="11277295" y="6611112"/>
+            <a:ext cx="685800" cy="201168"/>
+          </a:xfrm>
+          <a:prstGeom prst="rect">
+            <a:avLst/>
+          </a:prstGeom>
+          <a:noFill/>
+        </p:spPr>
+        <p:txBody>
+          <a:bodyPr wrap="none" lIns="0" tIns="0" rIns="0" bIns="0" anchor="b">
+            <a:noAutofit/>
+          </a:bodyPr>
+          <a:lstStyle/>
+          <a:p>
+            <a:pPr algn="r"/>
+            <a:fld id="{5C1A6E0B-3B1F-4D5E-9C7A-2F4B8D6E1A90}" type="slidenum">
+              <a:rPr lang="en-US" sz="1200" dirty="0">
+                <a:solidFill>
+                  <a:srgbClr val="5F6272"/>
+                </a:solidFill>
+              </a:rPr>
+              <a:t>2</a:t>
+            </a:fld>
+          </a:p>
+        </p:txBody>
+      </p:sp>
     </p:spTree>
   </p:cSld>
   <p:clrMapOvr>
@@ -10568,6 +10908,40 @@
           </a:p>
         </p:txBody>
       </p:sp>
+      <p:sp>
+        <p:nvSpPr>
+          <p:cNvPr id="10" name="Slide Number 10"/>
+          <p:cNvSpPr txBox="1"/>
+          <p:nvPr/>
+        </p:nvSpPr>
+        <p:spPr>
+          <a:xfrm>
+            <a:off x="11277295" y="6611112"/>
+            <a:ext cx="685800" cy="201168"/>
+          </a:xfrm>
+          <a:prstGeom prst="rect">
+            <a:avLst/>
+          </a:prstGeom>
+          <a:noFill/>
+        </p:spPr>
+        <p:txBody>
+          <a:bodyPr wrap="none" lIns="0" tIns="0" rIns="0" bIns="0" anchor="b">
+            <a:noAutofit/>
+          </a:bodyPr>
+          <a:lstStyle/>
+          <a:p>
+            <a:pPr algn="r"/>
+            <a:fld id="{5C1A6E0B-3B1F-4D5E-9C7A-2F4B8D6E1A90}" type="slidenum">
+              <a:rPr lang="en-US" sz="1200" dirty="0">
+                <a:solidFill>
+                  <a:srgbClr val="5F6272"/>
+                </a:solidFill>
+              </a:rPr>
+              <a:t>3</a:t>
+            </a:fld>
+          </a:p>
+        </p:txBody>
+      </p:sp>
     </p:spTree>
   </p:cSld>
   <p:clrMapOvr>
@@ -11334,6 +11708,40 @@
           </a:p>
         </p:txBody>
       </p:sp>
+      <p:sp>
+        <p:nvSpPr>
+          <p:cNvPr id="9" name="Slide Number 9"/>
+          <p:cNvSpPr txBox="1"/>
+          <p:nvPr/>
+        </p:nvSpPr>
+        <p:spPr>
+          <a:xfrm>
+            <a:off x="11277295" y="6611112"/>
+            <a:ext cx="685800" cy="201168"/>
+          </a:xfrm>
+          <a:prstGeom prst="rect">
+            <a:avLst/>
+          </a:prstGeom>
+          <a:noFill/>
+        </p:spPr>
+        <p:txBody>
+          <a:bodyPr wrap="none" lIns="0" tIns="0" rIns="0" bIns="0" anchor="b">
+            <a:noAutofit/>
+          </a:bodyPr>
+          <a:lstStyle/>
+          <a:p>
+            <a:pPr algn="r"/>
+            <a:fld id="{5C1A6E0B-3B1F-4D5E-9C7A-2F4B8D6E1A90}" type="slidenum">
+              <a:rPr lang="en-US" sz="1200" dirty="0">
+                <a:solidFill>
+                  <a:srgbClr val="5F6272"/>
+                </a:solidFill>
+              </a:rPr>
+              <a:t>4</a:t>
+            </a:fld>
+          </a:p>
+        </p:txBody>
+      </p:sp>
     </p:spTree>
   </p:cSld>
   <p:clrMapOvr>
@@ -11887,6 +12295,40 @@
           </a:p>
         </p:txBody>
       </p:sp>
+      <p:sp>
+        <p:nvSpPr>
+          <p:cNvPr id="7" name="Slide Number 7"/>
+          <p:cNvSpPr txBox="1"/>
+          <p:nvPr/>
+        </p:nvSpPr>
+        <p:spPr>
+          <a:xfrm>
+            <a:off x="11277295" y="6611112"/>
+            <a:ext cx="685800" cy="201168"/>
+          </a:xfrm>
+          <a:prstGeom prst="rect">
+            <a:avLst/>
+          </a:prstGeom>
+          <a:noFill/>
+        </p:spPr>
+        <p:txBody>
+          <a:bodyPr wrap="none" lIns="0" tIns="0" rIns="0" bIns="0" anchor="b">
+            <a:noAutofit/>
+          </a:bodyPr>
+          <a:lstStyle/>
+          <a:p>
+            <a:pPr algn="r"/>
+            <a:fld id="{5C1A6E0B-3B1F-4D5E-9C7A-2F4B8D6E1A90}" type="slidenum">
+              <a:rPr lang="en-US" sz="1200" dirty="0">
+                <a:solidFill>
+                  <a:srgbClr val="5F6272"/>
+                </a:solidFill>
+              </a:rPr>
+              <a:t>5</a:t>
+            </a:fld>
+          </a:p>
+        </p:txBody>
+      </p:sp>
     </p:spTree>
   </p:cSld>
   <p:clrMapOvr>
@@ -14218,6 +14660,40 @@
           </a:p>
         </p:txBody>
       </p:sp>
+      <p:sp>
+        <p:nvSpPr>
+          <p:cNvPr id="58" name="Slide Number 58"/>
+          <p:cNvSpPr txBox="1"/>
+          <p:nvPr/>
+        </p:nvSpPr>
+        <p:spPr>
+          <a:xfrm>
+            <a:off x="11277295" y="6611112"/>
+            <a:ext cx="685800" cy="201168"/>
+          </a:xfrm>
+          <a:prstGeom prst="rect">
+            <a:avLst/>
+          </a:prstGeom>
+          <a:noFill/>
+        </p:spPr>
+        <p:txBody>
+          <a:bodyPr wrap="none" lIns="0" tIns="0" rIns="0" bIns="0" anchor="b">
+            <a:noAutofit/>
+          </a:bodyPr>
+          <a:lstStyle/>
+          <a:p>
+            <a:pPr algn="r"/>
+            <a:fld id="{5C1A6E0B-3B1F-4D5E-9C7A-2F4B8D6E1A90}" type="slidenum">
+              <a:rPr lang="en-US" sz="1200" dirty="0">
+                <a:solidFill>
+                  <a:srgbClr val="5F6272"/>
+                </a:solidFill>
+              </a:rPr>
+              <a:t>6</a:t>
+            </a:fld>
+          </a:p>
+        </p:txBody>
+      </p:sp>
     </p:spTree>
   </p:cSld>
   <p:clrMapOvr>
@@ -14651,6 +15127,40 @@
           </a:p>
         </p:txBody>
       </p:sp>
+      <p:sp>
+        <p:nvSpPr>
+          <p:cNvPr id="7" name="Slide Number 7"/>
+          <p:cNvSpPr txBox="1"/>
+          <p:nvPr/>
+        </p:nvSpPr>
+        <p:spPr>
+          <a:xfrm>
+            <a:off x="11277295" y="6611112"/>
+            <a:ext cx="685800" cy="201168"/>
+          </a:xfrm>
+          <a:prstGeom prst="rect">
+            <a:avLst/>
+          </a:prstGeom>
+          <a:noFill/>
+        </p:spPr>
+        <p:txBody>
+          <a:bodyPr wrap="none" lIns="0" tIns="0" rIns="0" bIns="0" anchor="b">
+            <a:noAutofit/>
+          </a:bodyPr>
+          <a:lstStyle/>
+          <a:p>
+            <a:pPr algn="r"/>
+            <a:fld id="{5C1A6E0B-3B1F-4D5E-9C7A-2F4B8D6E1A90}" type="slidenum">
+              <a:rPr lang="en-US" sz="1200" dirty="0">
+                <a:solidFill>
+                  <a:srgbClr val="5F6272"/>
+                </a:solidFill>
+              </a:rPr>
+              <a:t>7</a:t>
+            </a:fld>
+          </a:p>
+        </p:txBody>
+      </p:sp>
     </p:spTree>
   </p:cSld>
   <p:clrMapOvr>
@@ -15431,6 +15941,40 @@
           </a:p>
         </p:txBody>
       </p:sp>
+      <p:sp>
+        <p:nvSpPr>
+          <p:cNvPr id="10" name="Slide Number 10"/>
+          <p:cNvSpPr txBox="1"/>
+          <p:nvPr/>
+        </p:nvSpPr>
+        <p:spPr>
+          <a:xfrm>
+            <a:off x="11277295" y="6611112"/>
+            <a:ext cx="685800" cy="201168"/>
+          </a:xfrm>
+          <a:prstGeom prst="rect">
+            <a:avLst/>
+          </a:prstGeom>
+          <a:noFill/>
+        </p:spPr>
+        <p:txBody>
+          <a:bodyPr wrap="none" lIns="0" tIns="0" rIns="0" bIns="0" anchor="b">
+            <a:noAutofit/>
+          </a:bodyPr>
+          <a:lstStyle/>
+          <a:p>
+            <a:pPr algn="r"/>
+            <a:fld id="{5C1A6E0B-3B1F-4D5E-9C7A-2F4B8D6E1A90}" type="slidenum">
+              <a:rPr lang="en-US" sz="1200" dirty="0">
+                <a:solidFill>
+                  <a:srgbClr val="5F6272"/>
+                </a:solidFill>
+              </a:rPr>
+              <a:t>8</a:t>
+            </a:fld>
+          </a:p>
+        </p:txBody>
+      </p:sp>
     </p:spTree>
   </p:cSld>
   <p:clrMapOvr>
@@ -15741,6 +16285,40 @@
               <a:t xml:space="preserve">Topic 2 Assessment · Section 504 Version</a:t>
             </a:r>
             <a:endParaRPr lang="en-US" sz="1125" dirty="0"/>
+          </a:p>
+        </p:txBody>
+      </p:sp>
+      <p:sp>
+        <p:nvSpPr>
+          <p:cNvPr id="7" name="Slide Number 7"/>
+          <p:cNvSpPr txBox="1"/>
+          <p:nvPr/>
+        </p:nvSpPr>
+        <p:spPr>
+          <a:xfrm>
+            <a:off x="11277295" y="6611112"/>
+            <a:ext cx="685800" cy="201168"/>
+          </a:xfrm>
+          <a:prstGeom prst="rect">
+            <a:avLst/>
+          </a:prstGeom>
+          <a:noFill/>
+        </p:spPr>
+        <p:txBody>
+          <a:bodyPr wrap="none" lIns="0" tIns="0" rIns="0" bIns="0" anchor="b">
+            <a:noAutofit/>
+          </a:bodyPr>
+          <a:lstStyle/>
+          <a:p>
+            <a:pPr algn="r"/>
+            <a:fld id="{5C1A6E0B-3B1F-4D5E-9C7A-2F4B8D6E1A90}" type="slidenum">
+              <a:rPr lang="en-US" sz="1200" dirty="0">
+                <a:solidFill>
+                  <a:srgbClr val="5F6272"/>
+                </a:solidFill>
+              </a:rPr>
+              <a:t>9</a:t>
+            </a:fld>
           </a:p>
         </p:txBody>
       </p:sp>
